--- a/assets/pptx/catalog-306.pptx
+++ b/assets/pptx/catalog-306.pptx
@@ -3453,7 +3453,7 @@
                 <a:ea typeface="Ebrima"/>
                 <a:cs typeface="Ebrima"/>
               </a:rPr>
-              <a:t>ከአፉ የወጣው በርግጥ ይፈፀማል (2x)</a:t>
+              <a:t>ከአፉ የወጣው በርግጥ ይፈፀማል 2x</a:t>
             </a:r>
           </a:p>
         </p:txBody>
@@ -3855,7 +3855,7 @@
                 <a:ea typeface="Ebrima"/>
                 <a:cs typeface="Ebrima"/>
               </a:rPr>
-              <a:t>ከአፉ የወጣው በርግጥ ይፈፀማል (2x)</a:t>
+              <a:t>ከአፉ የወጣው በርግጥ ይፈፀማል 2x</a:t>
             </a:r>
           </a:p>
         </p:txBody>
